--- a/modulo-01/01.00_ABAP_moderno_uma_jornada_essencial.pptx
+++ b/modulo-01/01.00_ABAP_moderno_uma_jornada_essencial.pptx
@@ -3766,7 +3766,7 @@
         </p:blipFill>
         <p:spPr>
           <a:xfrm>
-            <a:off x="6511900" y="2694432"/>
+            <a:off x="9342653" y="2694432"/>
             <a:ext cx="256032" cy="256032"/>
           </a:xfrm>
           <a:prstGeom prst="rect">
@@ -3790,7 +3790,7 @@
         </p:blipFill>
         <p:spPr>
           <a:xfrm>
-            <a:off x="9342653" y="2694432"/>
+            <a:off x="6511900" y="2694432"/>
             <a:ext cx="256032" cy="256032"/>
           </a:xfrm>
           <a:prstGeom prst="rect">
@@ -4618,7 +4618,7 @@
         </p:blipFill>
         <p:spPr>
           <a:xfrm>
-            <a:off x="822960" y="3886200"/>
+            <a:off x="6355080" y="3886200"/>
             <a:ext cx="256032" cy="256032"/>
           </a:xfrm>
           <a:prstGeom prst="rect">
@@ -4642,7 +4642,7 @@
         </p:blipFill>
         <p:spPr>
           <a:xfrm>
-            <a:off x="6355080" y="3886200"/>
+            <a:off x="822960" y="3886200"/>
             <a:ext cx="256032" cy="256032"/>
           </a:xfrm>
           <a:prstGeom prst="rect">
@@ -6185,8 +6185,8 @@
         </p:blipFill>
         <p:spPr>
           <a:xfrm>
-            <a:off x="5455768" y="1847088"/>
-            <a:ext cx="347472" cy="347472"/>
+            <a:off x="749808" y="5751576"/>
+            <a:ext cx="310896" cy="310896"/>
           </a:xfrm>
           <a:prstGeom prst="rect">
             <a:avLst/>
@@ -6209,7 +6209,7 @@
         </p:blipFill>
         <p:spPr>
           <a:xfrm>
-            <a:off x="2636444" y="1847088"/>
+            <a:off x="5455768" y="1847088"/>
             <a:ext cx="347472" cy="347472"/>
           </a:xfrm>
           <a:prstGeom prst="rect">
@@ -6233,7 +6233,7 @@
         </p:blipFill>
         <p:spPr>
           <a:xfrm>
-            <a:off x="8275091" y="1847088"/>
+            <a:off x="2636444" y="3858768"/>
             <a:ext cx="347472" cy="347472"/>
           </a:xfrm>
           <a:prstGeom prst="rect">
@@ -6257,7 +6257,7 @@
         </p:blipFill>
         <p:spPr>
           <a:xfrm>
-            <a:off x="11094415" y="1847088"/>
+            <a:off x="8275091" y="1847088"/>
             <a:ext cx="347472" cy="347472"/>
           </a:xfrm>
           <a:prstGeom prst="rect">
@@ -6281,7 +6281,7 @@
         </p:blipFill>
         <p:spPr>
           <a:xfrm>
-            <a:off x="2636444" y="3858768"/>
+            <a:off x="2636444" y="1847088"/>
             <a:ext cx="347472" cy="347472"/>
           </a:xfrm>
           <a:prstGeom prst="rect">
@@ -6305,7 +6305,7 @@
         </p:blipFill>
         <p:spPr>
           <a:xfrm>
-            <a:off x="5455768" y="3858768"/>
+            <a:off x="8275091" y="3858768"/>
             <a:ext cx="347472" cy="347472"/>
           </a:xfrm>
           <a:prstGeom prst="rect">
@@ -6329,7 +6329,7 @@
         </p:blipFill>
         <p:spPr>
           <a:xfrm>
-            <a:off x="8275091" y="3858768"/>
+            <a:off x="11094415" y="1847088"/>
             <a:ext cx="347472" cy="347472"/>
           </a:xfrm>
           <a:prstGeom prst="rect">
@@ -6353,7 +6353,7 @@
         </p:blipFill>
         <p:spPr>
           <a:xfrm>
-            <a:off x="11094415" y="3858768"/>
+            <a:off x="5455768" y="3858768"/>
             <a:ext cx="347472" cy="347472"/>
           </a:xfrm>
           <a:prstGeom prst="rect">
@@ -6377,8 +6377,8 @@
         </p:blipFill>
         <p:spPr>
           <a:xfrm>
-            <a:off x="749808" y="5751576"/>
-            <a:ext cx="310896" cy="310896"/>
+            <a:off x="11094415" y="3858768"/>
+            <a:ext cx="347472" cy="347472"/>
           </a:xfrm>
           <a:prstGeom prst="rect">
             <a:avLst/>
@@ -11877,7 +11877,7 @@
         <p:spPr>
           <a:xfrm>
             <a:off x="640080" y="1700784"/>
-            <a:ext cx="1764792" cy="292608"/>
+            <a:ext cx="2852928" cy="292608"/>
           </a:xfrm>
           <a:prstGeom prst="rect">
             <a:avLst/>
@@ -11897,7 +11897,7 @@
         <p:spPr>
           <a:xfrm>
             <a:off x="640080" y="1700784"/>
-            <a:ext cx="1764792" cy="27432"/>
+            <a:ext cx="2852928" cy="27432"/>
           </a:xfrm>
           <a:prstGeom prst="rect">
             <a:avLst/>
@@ -11917,7 +11917,7 @@
         <p:spPr>
           <a:xfrm>
             <a:off x="731520" y="1719072"/>
-            <a:ext cx="1581912" cy="274320"/>
+            <a:ext cx="2670048" cy="274320"/>
           </a:xfrm>
           <a:prstGeom prst="rect">
             <a:avLst/>
@@ -11938,7 +11938,7 @@
                   <a:srgbClr val="FFFFFF"/>
                 </a:solidFill>
               </a:rPr>
-              <a:t>zcl_voos.clas.abap</a:t>
+              <a:t>zcl_pc_pedidos_abertos.clas.abap</a:t>
             </a:r>
             <a:endParaRPr lang="en-US" sz="950" dirty="0"/>
           </a:p>
@@ -11974,7 +11974,7 @@
                   <a:srgbClr val="9DA5B4"/>
                 </a:solidFill>
               </a:rPr>
-              <a:t>ZS4D400_## › ZCL_VOOS</a:t>
+              <a:t>Projeto Pedidos de Compras › consulta sobre ZR_PC_PEDIDO</a:t>
             </a:r>
             <a:endParaRPr lang="en-US" sz="850" dirty="0"/>
           </a:p>
@@ -12420,7 +12420,7 @@
                 <a:ea typeface="Courier New" pitchFamily="34" charset="-122"/>
                 <a:cs typeface="Courier New" pitchFamily="34" charset="-120"/>
               </a:rPr>
-              <a:t>zcl_voos</a:t>
+              <a:t>zcl_pc_pedidos_abertos</a:t>
             </a:r>
             <a:r>
               <a:rPr lang="en-US" sz="1050" dirty="0">
@@ -12762,7 +12762,7 @@
                 <a:ea typeface="Courier New" pitchFamily="34" charset="-122"/>
                 <a:cs typeface="Courier New" pitchFamily="34" charset="-120"/>
               </a:rPr>
-              <a:t>zcl_voos</a:t>
+              <a:t>zcl_pc_pedidos_abertos</a:t>
             </a:r>
             <a:r>
               <a:rPr lang="en-US" sz="1050" dirty="0">
@@ -12928,13 +12928,13 @@
             <a:r>
               <a:rPr lang="en-US" sz="1050" dirty="0">
                 <a:solidFill>
-                  <a:srgbClr val="4EC9B0"/>
-                </a:solidFill>
-                <a:latin typeface="Courier New" pitchFamily="34" charset="0"/>
-                <a:ea typeface="Courier New" pitchFamily="34" charset="-122"/>
-                <a:cs typeface="Courier New" pitchFamily="34" charset="-120"/>
-              </a:rPr>
-              <a:t>/DMO/I_Connection</a:t>
+                  <a:srgbClr val="CCCCCC"/>
+                </a:solidFill>
+                <a:latin typeface="Courier New" pitchFamily="34" charset="0"/>
+                <a:ea typeface="Courier New" pitchFamily="34" charset="-122"/>
+                <a:cs typeface="Courier New" pitchFamily="34" charset="-120"/>
+              </a:rPr>
+              <a:t>zr_pc_pedido</a:t>
             </a:r>
             <a:endParaRPr lang="en-US" sz="1050" dirty="0"/>
           </a:p>
@@ -12987,7 +12987,7 @@
                 <a:ea typeface="Courier New" pitchFamily="34" charset="-122"/>
                 <a:cs typeface="Courier New" pitchFamily="34" charset="-120"/>
               </a:rPr>
-              <a:t>AirlineID</a:t>
+              <a:t>NumeroPedido</a:t>
             </a:r>
             <a:r>
               <a:rPr lang="en-US" sz="1050" dirty="0">
@@ -13020,7 +13020,40 @@
                 <a:ea typeface="Courier New" pitchFamily="34" charset="-122"/>
                 <a:cs typeface="Courier New" pitchFamily="34" charset="-120"/>
               </a:rPr>
-              <a:t>ConnectionID</a:t>
+              <a:t>ValorTotal</a:t>
+            </a:r>
+            <a:r>
+              <a:rPr lang="en-US" sz="1050" dirty="0">
+                <a:solidFill>
+                  <a:srgbClr val="CCCCCC"/>
+                </a:solidFill>
+                <a:latin typeface="Courier New" pitchFamily="34" charset="0"/>
+                <a:ea typeface="Courier New" pitchFamily="34" charset="-122"/>
+                <a:cs typeface="Courier New" pitchFamily="34" charset="-120"/>
+              </a:rPr>
+              <a:t>,</a:t>
+            </a:r>
+            <a:r>
+              <a:rPr lang="en-US" sz="1050" dirty="0">
+                <a:solidFill>
+                  <a:srgbClr val="CCCCCC"/>
+                </a:solidFill>
+                <a:latin typeface="Courier New" pitchFamily="34" charset="0"/>
+                <a:ea typeface="Courier New" pitchFamily="34" charset="-122"/>
+                <a:cs typeface="Courier New" pitchFamily="34" charset="-120"/>
+              </a:rPr>
+              <a:t> </a:t>
+            </a:r>
+            <a:r>
+              <a:rPr lang="en-US" sz="1050" dirty="0">
+                <a:solidFill>
+                  <a:srgbClr val="CCCCCC"/>
+                </a:solidFill>
+                <a:latin typeface="Courier New" pitchFamily="34" charset="0"/>
+                <a:ea typeface="Courier New" pitchFamily="34" charset="-122"/>
+                <a:cs typeface="Courier New" pitchFamily="34" charset="-120"/>
+              </a:rPr>
+              <a:t>Currency</a:t>
             </a:r>
             <a:r>
               <a:rPr lang="en-US" sz="1050" dirty="0">
@@ -13073,7 +13106,7 @@
                 <a:ea typeface="Courier New" pitchFamily="34" charset="-122"/>
                 <a:cs typeface="Courier New" pitchFamily="34" charset="-120"/>
               </a:rPr>
-              <a:t>_Airline-Name</a:t>
+              <a:t>_Cliente-Nome</a:t>
             </a:r>
             <a:r>
               <a:rPr lang="en-US" sz="1050" dirty="0">
@@ -13117,7 +13150,7 @@
                 <a:ea typeface="Courier New" pitchFamily="34" charset="-122"/>
                 <a:cs typeface="Courier New" pitchFamily="34" charset="-120"/>
               </a:rPr>
-              <a:t>Airline</a:t>
+              <a:t>Cliente</a:t>
             </a:r>
             <a:endParaRPr lang="en-US" sz="1050" dirty="0"/>
           </a:p>
@@ -13170,7 +13203,7 @@
                 <a:ea typeface="Courier New" pitchFamily="34" charset="-122"/>
                 <a:cs typeface="Courier New" pitchFamily="34" charset="-120"/>
               </a:rPr>
-              <a:t>DepartureAirport</a:t>
+              <a:t>StatusPedido</a:t>
             </a:r>
             <a:r>
               <a:rPr lang="en-US" sz="1050" dirty="0">
@@ -13214,7 +13247,7 @@
                 <a:ea typeface="Courier New" pitchFamily="34" charset="-122"/>
                 <a:cs typeface="Courier New" pitchFamily="34" charset="-120"/>
               </a:rPr>
-              <a:t>'FRA'</a:t>
+              <a:t>'ABERTO'</a:t>
             </a:r>
             <a:endParaRPr lang="en-US" sz="1050" dirty="0"/>
           </a:p>
@@ -13322,7 +13355,7 @@
                 <a:ea typeface="Courier New" pitchFamily="34" charset="-122"/>
                 <a:cs typeface="Courier New" pitchFamily="34" charset="-120"/>
               </a:rPr>
-              <a:t>flights</a:t>
+              <a:t>pedidos</a:t>
             </a:r>
             <a:r>
               <a:rPr lang="en-US" sz="1050" dirty="0">
@@ -13439,7 +13472,7 @@
                 <a:ea typeface="Courier New" pitchFamily="34" charset="-122"/>
                 <a:cs typeface="Courier New" pitchFamily="34" charset="-120"/>
               </a:rPr>
-              <a:t>flights</a:t>
+              <a:t>pedidos</a:t>
             </a:r>
             <a:r>
               <a:rPr lang="en-US" sz="1050" dirty="0">
@@ -13505,7 +13538,7 @@
                 <a:ea typeface="Courier New" pitchFamily="34" charset="-122"/>
                 <a:cs typeface="Courier New" pitchFamily="34" charset="-120"/>
               </a:rPr>
-              <a:t>flight</a:t>
+              <a:t>pedido</a:t>
             </a:r>
             <a:r>
               <a:rPr lang="en-US" sz="1050" dirty="0">
@@ -13613,7 +13646,7 @@
                 <a:ea typeface="Courier New" pitchFamily="34" charset="-122"/>
                 <a:cs typeface="Courier New" pitchFamily="34" charset="-120"/>
               </a:rPr>
-              <a:t>|{ flight-Airline }: { flight-ConnectionID }|</a:t>
+              <a:t>|{ pedido-NumeroPedido }: { pedido-Cliente }|</a:t>
             </a:r>
             <a:r>
               <a:rPr lang="en-US" sz="1050" dirty="0">
@@ -14024,7 +14057,7 @@
                   <a:srgbClr val="556B82"/>
                 </a:solidFill>
               </a:rPr>
-              <a:t>Lê da view liberada e da associação </a:t>
+              <a:t>Lê a view do BO Pedido e, pela associação </a:t>
             </a:r>
             <a:r>
               <a:rPr lang="en-US" sz="1050" dirty="0">
@@ -14035,7 +14068,7 @@
                 <a:ea typeface="Courier New" pitchFamily="34" charset="-122"/>
                 <a:cs typeface="Courier New" pitchFamily="34" charset="-120"/>
               </a:rPr>
-              <a:t>_Airline</a:t>
+              <a:t>_Cliente</a:t>
             </a:r>
             <a:r>
               <a:rPr lang="en-US" sz="1050" dirty="0">
@@ -14043,7 +14076,7 @@
                   <a:srgbClr val="556B82"/>
                 </a:solidFill>
               </a:rPr>
-              <a:t>.</a:t>
+              <a:t>, o nome do cliente.</a:t>
             </a:r>
             <a:endParaRPr lang="en-US" sz="1400" dirty="0"/>
           </a:p>
